--- a/public/materialy/1L/7/Prezentace k hodinám/5. Efektivní vyhledávání.pptx
+++ b/public/materialy/1L/7/Prezentace k hodinám/5. Efektivní vyhledávání.pptx
@@ -548,7 +548,7 @@
           </a:p>
           <a:p xmlns:a="http://schemas.openxmlformats.org/drawingml/2006/main">
             <a:r>
-              <a:t>Soubory: 05_vyhledavaci_vyzva.txt, digitální pracovní sešit, webový prohlížeč</a:t>
+              <a:t>Soubory: 5. Vyhledávací výzva.txt, digitální pracovní sešit, webový prohlížeč</a:t>
             </a:r>
           </a:p>
           <a:p xmlns:a="http://schemas.openxmlformats.org/drawingml/2006/main">
@@ -808,7 +808,7 @@
           <a:lstStyle xmlns:a="http://schemas.openxmlformats.org/drawingml/2006/main"/>
           <a:p xmlns:a="http://schemas.openxmlformats.org/drawingml/2006/main">
             <a:r>
-              <a:t>Hlavní aktivita využívá: 05_vyhledavaci_vyzva.txt, digitální pracovní sešit, webový prohlížeč</a:t>
+              <a:t>Hlavní aktivita využívá: 5. Vyhledávací výzva.txt, digitální pracovní sešit, webový prohlížeč</a:t>
             </a:r>
           </a:p>
           <a:p xmlns:a="http://schemas.openxmlformats.org/drawingml/2006/main">
@@ -3702,7 +3702,7 @@
               </a:defRPr>
             </a:pPr>
             <a:r>
-              <a:t>05_vyhledavaci_vyzva.txt, digitální pracovní sešit, webový prohlížeč</a:t>
+              <a:t>5. Vyhledávací výzva.txt, digitální pracovní sešit, webový prohlížeč</a:t>
             </a:r>
           </a:p>
         </p:txBody>

--- a/public/materialy/1L/7/Prezentace k hodinám/5. Efektivní vyhledávání.pptx
+++ b/public/materialy/1L/7/Prezentace k hodinám/5. Efektivní vyhledávání.pptx
@@ -558,7 +558,7 @@
           </a:p>
           <a:p xmlns:a="http://schemas.openxmlformats.org/drawingml/2006/main">
             <a:r>
-              <a:t>Před otevřením dalšího snímku stručně uveďte téma a nechte studenty připravit pracovní soubory.</a:t>
+              <a:t>Před otevřením dalšího snímku stručně uveď téma a nech studenty připravit pracovní soubory.</a:t>
             </a:r>
           </a:p>
         </p:txBody>
@@ -638,7 +638,7 @@
           </a:p>
           <a:p xmlns:a="http://schemas.openxmlformats.org/drawingml/2006/main">
             <a:r>
-              <a:t>Postup učitele: Nechte studenty přepsat neurčitý dotaz na otázku s účelem.</a:t>
+              <a:t>Postup učitele: Nech studenty přepsat neurčitý dotaz na otázku s účelem.</a:t>
             </a:r>
           </a:p>
           <a:p xmlns:a="http://schemas.openxmlformats.org/drawingml/2006/main">
@@ -648,7 +648,7 @@
           </a:p>
           <a:p xmlns:a="http://schemas.openxmlformats.org/drawingml/2006/main">
             <a:r>
-              <a:t>Neprozrazujte správnou odpověď. Cílem je zachytit počáteční úsudek, ke kterému se třída vrátí při reflexi.</a:t>
+              <a:t>Neprozrazuj správnou odpověď. Cílem je zachytit počáteční úsudek, ke kterému se třída vrátí při reflexi.</a:t>
             </a:r>
           </a:p>
         </p:txBody>
@@ -728,7 +728,7 @@
           </a:p>
           <a:p xmlns:a="http://schemas.openxmlformats.org/drawingml/2006/main">
             <a:r>
-              <a:t>Postup učitele: Demonstrujte uvozovky, site:, filetype: a vyloučení slov.</a:t>
+              <a:t>Postup učitele: Demonstruj uvozovky, site:, filetype: a vyloučení slov.</a:t>
             </a:r>
           </a:p>
           <a:p xmlns:a="http://schemas.openxmlformats.org/drawingml/2006/main">
@@ -738,7 +738,7 @@
           </a:p>
           <a:p xmlns:a="http://schemas.openxmlformats.org/drawingml/2006/main">
             <a:r>
-              <a:t>Nechte studenty doplnit příklad ke každému bodu. Přechod k aktivitě proveďte otázkou: Jak tyto tři body použijeme na dnešní soubor?</a:t>
+              <a:t>Nech studenty doplnit příklad ke každému bodu. Přechod k aktivitě proveď otázkou: Jak tyto tři body použijeme na dnešní soubor?</a:t>
             </a:r>
           </a:p>
         </p:txBody>
@@ -813,7 +813,7 @@
           </a:p>
           <a:p xmlns:a="http://schemas.openxmlformats.org/drawingml/2006/main">
             <a:r>
-              <a:t>13–31 min – Vyhledávací výzva: Studenti pracují samostatně; pomáhejte otázkou, ne hotovým dotazem.</a:t>
+              <a:t>13–31 min – Vyhledávací výzva: Studenti pracují samostatně; pomáhej otázkou, ne hotovým dotazem.</a:t>
             </a:r>
           </a:p>
           <a:p xmlns:a="http://schemas.openxmlformats.org/drawingml/2006/main">
@@ -823,7 +823,7 @@
           </a:p>
           <a:p xmlns:a="http://schemas.openxmlformats.org/drawingml/2006/main">
             <a:r>
-              <a:t>38–42 min – Výběr zdroje: Oddělte relevanci, autoritu a aktuálnost.</a:t>
+              <a:t>38–42 min – Výběr zdroje: Odděl relevanci, autoritu a aktuálnost.</a:t>
             </a:r>
           </a:p>
           <a:p xmlns:a="http://schemas.openxmlformats.org/drawingml/2006/main">
@@ -833,7 +833,7 @@
           </a:p>
           <a:p xmlns:a="http://schemas.openxmlformats.org/drawingml/2006/main">
             <a:r>
-              <a:t>Během práce nepřebírejte myš za studenta. Pomáhejte otázkami z dalšího snímku a žádejte, aby každé rozhodnutí opřel o konkrétní znak nebo zdroj.</a:t>
+              <a:t>Během práce nepřebírej myš za studenta. Pomáhej otázkami z dalšího snímku a žádej, aby každé rozhodnutí opřel o konkrétní znak nebo zdroj.</a:t>
             </a:r>
           </a:p>
         </p:txBody>
@@ -913,7 +913,7 @@
           </a:p>
           <a:p xmlns:a="http://schemas.openxmlformats.org/drawingml/2006/main">
             <a:r>
-              <a:t>Podpora: Nabídněte stavebnici dotazu: klíčový pojem + instituce + typ dokumentu + omezení domény.</a:t>
+              <a:t>Podpora: Nabídni stavebnici dotazu: klíčový pojem + instituce + typ dokumentu + omezení domény.</a:t>
             </a:r>
           </a:p>
           <a:p xmlns:a="http://schemas.openxmlformats.org/drawingml/2006/main">
@@ -923,7 +923,7 @@
           </a:p>
           <a:p xmlns:a="http://schemas.openxmlformats.org/drawingml/2006/main">
             <a:r>
-              <a:t>Pro rychlou mezikontrolu nechte dvojice vyměnit výstup a označit jeden dobře doložený bod a jednu otázku, která ještě zůstává.</a:t>
+              <a:t>Pro rychlou mezikontrolu nech dvojice vyměnit výstup a označit jeden dobře doložený bod a jednu otázku, která ještě zůstává.</a:t>
             </a:r>
           </a:p>
         </p:txBody>
@@ -993,17 +993,17 @@
           <a:lstStyle xmlns:a="http://schemas.openxmlformats.org/drawingml/2006/main"/>
           <a:p xmlns:a="http://schemas.openxmlformats.org/drawingml/2006/main">
             <a:r>
-              <a:t>Očekávané závěry: NÚKIB PDF: Např. kybernetická bezpečnost site:nukib.gov.cz filetype:pdf. | Adresa školy: Např. přesný název vaší školy a operátor site: s doménou školního webu. | ÚOOÚ školství: Např. školství osobní údaje site:uoou.gov.cz. | 2FA: Odborný dotaz s termínem dvoufaktorová autentizace a identifikovanou institucí či autorem. | Dva zdroje: Nestačí dva výsledky přebírající stejnou tiskovou zprávu; hledejte nezávislý původ.</a:t>
-            </a:r>
-          </a:p>
-          <a:p xmlns:a="http://schemas.openxmlformats.org/drawingml/2006/main">
-            <a:r>
-              <a:t>Časté chyby a intervence: Student zapisuje pouze odpověď. → Vraťte úkol k dohledatelné cestě: dotaz – URL – původce – důvod výběru. | „Oficiální zdroj je vždy nejlepší.“ → Je vhodný pro vlastní pravidla instituce; pro dopad či kritiku může být potřeba jiný typ zdroje. | Student mění dotaz bez záznamu. → Nechte zachovat alespoň první a poslední verzi, aby byl postup viditelný.</a:t>
-            </a:r>
-          </a:p>
-          <a:p xmlns:a="http://schemas.openxmlformats.org/drawingml/2006/main">
-            <a:r>
-              <a:t>Nečtěte celý klíč. Vyberte dva studentské postupy, které vedou k odlišným závěrům, a nechte třídu určit, který je lépe podložený.</a:t>
+              <a:t>Očekávané závěry: NÚKIB PDF: Např. kybernetická bezpečnost site:nukib.gov.cz filetype:pdf. | Adresa školy: Např. přesný název vaší školy a operátor site: s doménou školního webu. | ÚOOÚ školství: Např. školství osobní údaje site:uoou.gov.cz. | 2FA: Odborný dotaz s termínem dvoufaktorová autentizace a identifikovanou institucí či autorem. | Dva zdroje: Nestačí dva výsledky přebírající stejnou tiskovou zprávu; hledej nezávislý původ.</a:t>
+            </a:r>
+          </a:p>
+          <a:p xmlns:a="http://schemas.openxmlformats.org/drawingml/2006/main">
+            <a:r>
+              <a:t>Časté chyby a intervence: Student zapisuje pouze odpověď. → Vrať úkol k dohledatelné cestě: dotaz – URL – původce – důvod výběru. | „Oficiální zdroj je vždy nejlepší.“ → Je vhodný pro vlastní pravidla instituce; pro dopad či kritiku může být potřeba jiný typ zdroje. | Student mění dotaz bez záznamu. → Nech zachovat alespoň první a poslední verzi, aby byl postup viditelný.</a:t>
+            </a:r>
+          </a:p>
+          <a:p xmlns:a="http://schemas.openxmlformats.org/drawingml/2006/main">
+            <a:r>
+              <a:t>Nečti celý klíč. Vyber dva studentské postupy, které vedou k odlišným závěrům, a nech třídu určit, který je lépe podložený.</a:t>
             </a:r>
           </a:p>
         </p:txBody>
@@ -1078,7 +1078,7 @@
           </a:p>
           <a:p xmlns:a="http://schemas.openxmlformats.org/drawingml/2006/main">
             <a:r>
-              <a:t>Podpora: Nabídněte stavebnici dotazu: klíčový pojem + instituce + typ dokumentu + omezení domény.</a:t>
+              <a:t>Podpora: Nabídni stavebnici dotazu: klíčový pojem + instituce + typ dokumentu + omezení domény.</a:t>
             </a:r>
           </a:p>
           <a:p xmlns:a="http://schemas.openxmlformats.org/drawingml/2006/main">
@@ -1093,7 +1093,7 @@
           </a:p>
           <a:p xmlns:a="http://schemas.openxmlformats.org/drawingml/2006/main">
             <a:r>
-              <a:t>Vyberte způsob odevzdání předem. Odpověď použijte jako diagnostiku pro začátek další hodiny; nehodnoťte pouze formální správnost, ale konkrétnost a zdůvodnění.</a:t>
+              <a:t>Vyber způsob odevzdání předem. Odpověď použij jako diagnostiku pro začátek další hodiny; nehodnoť pouze formální správnost, ale konkrétnost a zdůvodnění.</a:t>
             </a:r>
           </a:p>
         </p:txBody>

--- a/public/materialy/1L/7/Prezentace k hodinám/5. Efektivní vyhledávání.pptx
+++ b/public/materialy/1L/7/Prezentace k hodinám/5. Efektivní vyhledávání.pptx
@@ -543,7 +543,7 @@
           <a:lstStyle xmlns:a="http://schemas.openxmlformats.org/drawingml/2006/main"/>
           <a:p xmlns:a="http://schemas.openxmlformats.org/drawingml/2006/main">
             <a:r>
-              <a:t>Výukový cíl: Student převede informační potřebu na přesný dotaz, použije operátory a zaznamená cestu k vybranému zdroji.</a:t>
+              <a:t>Výukový cíl: Student převede informační potřebu na přesný dotaz, použije operátory a zaznamená cestu k vybranému zdroji.</a:t>
             </a:r>
           </a:p>
           <a:p xmlns:a="http://schemas.openxmlformats.org/drawingml/2006/main">
@@ -553,12 +553,12 @@
           </a:p>
           <a:p xmlns:a="http://schemas.openxmlformats.org/drawingml/2006/main">
             <a:r>
-              <a:t>Výstup: Záznam šesti dotazů, vybraných URL, původců a důvodů výběru.</a:t>
-            </a:r>
-          </a:p>
-          <a:p xmlns:a="http://schemas.openxmlformats.org/drawingml/2006/main">
-            <a:r>
-              <a:t>Před otevřením dalšího snímku stručně uveď téma a nech studenty připravit pracovní soubory.</a:t>
+              <a:t>Výstup: Záznam šesti dotazů, vybraných URL, původců a důvodů výběru.</a:t>
+            </a:r>
+          </a:p>
+          <a:p xmlns:a="http://schemas.openxmlformats.org/drawingml/2006/main">
+            <a:r>
+              <a:t>Před otevřením dalšího snímku stručně uveď téma a nech studenty připravit pracovní soubory.</a:t>
             </a:r>
           </a:p>
         </p:txBody>
@@ -638,7 +638,7 @@
           </a:p>
           <a:p xmlns:a="http://schemas.openxmlformats.org/drawingml/2006/main">
             <a:r>
-              <a:t>Postup učitele: Nech studenty přepsat neurčitý dotaz na otázku s účelem.</a:t>
+              <a:t>Postup učitele: Nech studenty přepsat neurčitý dotaz na otázku s účelem.</a:t>
             </a:r>
           </a:p>
           <a:p xmlns:a="http://schemas.openxmlformats.org/drawingml/2006/main">
@@ -723,22 +723,22 @@
           </a:p>
           <a:p xmlns:a="http://schemas.openxmlformats.org/drawingml/2006/main">
             <a:r>
-              <a:t>Činnost: Operátory a filtry.</a:t>
-            </a:r>
-          </a:p>
-          <a:p xmlns:a="http://schemas.openxmlformats.org/drawingml/2006/main">
-            <a:r>
-              <a:t>Postup učitele: Demonstruj uvozovky, site:, filetype: a vyloučení slov.</a:t>
-            </a:r>
-          </a:p>
-          <a:p xmlns:a="http://schemas.openxmlformats.org/drawingml/2006/main">
-            <a:r>
-              <a:t>Klíčové závěry: NÚKIB PDF: Např. kybernetická bezpečnost site:nukib.gov.cz filetype:pdf. | Adresa školy: Např. přesný název vaší školy a operátor site: s doménou školního webu. | ÚOOÚ školství: Např. školství osobní údaje site:uoou.gov.cz.</a:t>
-            </a:r>
-          </a:p>
-          <a:p xmlns:a="http://schemas.openxmlformats.org/drawingml/2006/main">
-            <a:r>
-              <a:t>Nech studenty doplnit příklad ke každému bodu. Přechod k aktivitě proveď otázkou: Jak tyto tři body použijeme na dnešní soubor?</a:t>
+              <a:t>Činnost: Operátory a filtry.</a:t>
+            </a:r>
+          </a:p>
+          <a:p xmlns:a="http://schemas.openxmlformats.org/drawingml/2006/main">
+            <a:r>
+              <a:t>Postup učitele: Demonstruj uvozovky, site:, filetype: a vyloučení slov.</a:t>
+            </a:r>
+          </a:p>
+          <a:p xmlns:a="http://schemas.openxmlformats.org/drawingml/2006/main">
+            <a:r>
+              <a:t>Klíčové závěry: NÚKIB PDF: Např. kybernetická bezpečnost site:nukib.gov.cz filetype:pdf. | Adresa školy: Např. přesný název vaší školy a operátor site: s doménou školního webu. | ÚOOÚ školství: Např. školství osobní údaje site:uoou.gov.cz.</a:t>
+            </a:r>
+          </a:p>
+          <a:p xmlns:a="http://schemas.openxmlformats.org/drawingml/2006/main">
+            <a:r>
+              <a:t>Nech studenty doplnit příklad ke každému bodu. Přechod k aktivitě proveď otázkou: Jak tyto tři body použijeme na dnešní soubor?</a:t>
             </a:r>
           </a:p>
         </p:txBody>
@@ -818,22 +818,22 @@
           </a:p>
           <a:p xmlns:a="http://schemas.openxmlformats.org/drawingml/2006/main">
             <a:r>
-              <a:t>31–38 min – Porovnání cest: Dvojice srovnají rozdílné dotazy vedoucí k témuž zdroji.</a:t>
-            </a:r>
-          </a:p>
-          <a:p xmlns:a="http://schemas.openxmlformats.org/drawingml/2006/main">
-            <a:r>
-              <a:t>38–42 min – Výběr zdroje: Odděl relevanci, autoritu a aktuálnost.</a:t>
-            </a:r>
-          </a:p>
-          <a:p xmlns:a="http://schemas.openxmlformats.org/drawingml/2006/main">
-            <a:r>
-              <a:t>Požadovaný výstup: Záznam šesti dotazů, vybraných URL, původců a důvodů výběru.</a:t>
-            </a:r>
-          </a:p>
-          <a:p xmlns:a="http://schemas.openxmlformats.org/drawingml/2006/main">
-            <a:r>
-              <a:t>Během práce nepřebírej myš za studenta. Pomáhej otázkami z dalšího snímku a žádej, aby každé rozhodnutí opřel o konkrétní znak nebo zdroj.</a:t>
+              <a:t>31–38 min – Porovnání cest: Dvojice srovnají rozdílné dotazy vedoucí k témuž zdroji.</a:t>
+            </a:r>
+          </a:p>
+          <a:p xmlns:a="http://schemas.openxmlformats.org/drawingml/2006/main">
+            <a:r>
+              <a:t>38–42 min – Výběr zdroje: Odděl relevanci, autoritu a aktuálnost.</a:t>
+            </a:r>
+          </a:p>
+          <a:p xmlns:a="http://schemas.openxmlformats.org/drawingml/2006/main">
+            <a:r>
+              <a:t>Požadovaný výstup: Záznam šesti dotazů, vybraných URL, původců a důvodů výběru.</a:t>
+            </a:r>
+          </a:p>
+          <a:p xmlns:a="http://schemas.openxmlformats.org/drawingml/2006/main">
+            <a:r>
+              <a:t>Během práce nepřebírej myš za studenta. Pomáhej otázkami z dalšího snímku a žádej, aby každé rozhodnutí opřel o konkrétní znak nebo zdroj.</a:t>
             </a:r>
           </a:p>
         </p:txBody>
@@ -903,12 +903,12 @@
           <a:lstStyle xmlns:a="http://schemas.openxmlformats.org/drawingml/2006/main"/>
           <a:p xmlns:a="http://schemas.openxmlformats.org/drawingml/2006/main">
             <a:r>
-              <a:t>Kritérium úspěchu: Student doloží alespoň čtyři úkoly dotazem, zdrojem a vysvětlením vhodnosti.</a:t>
-            </a:r>
-          </a:p>
-          <a:p xmlns:a="http://schemas.openxmlformats.org/drawingml/2006/main">
-            <a:r>
-              <a:t>Vodicí otázky: Které slovo v dotazu je příliš obecné a čím ho nahradíš? | Hledáš pravidlo instituce, odborné vysvětlení, nebo zkušenost uživatele? | Jak poznáš reklamní výsledek a proč nemusí být první výsledek nejlepší?</a:t>
+              <a:t>Kritérium úspěchu: Student doloží alespoň čtyři úkoly dotazem, zdrojem a vysvětlením vhodnosti.</a:t>
+            </a:r>
+          </a:p>
+          <a:p xmlns:a="http://schemas.openxmlformats.org/drawingml/2006/main">
+            <a:r>
+              <a:t>Vodicí otázky: Které slovo v dotazu je příliš obecné a čím ho nahradíš? | Hledáš pravidlo instituce, odborné vysvětlení, nebo zkušenost uživatele? | Jak poznáš reklamní výsledek a proč nemusí být první výsledek nejlepší?</a:t>
             </a:r>
           </a:p>
           <a:p xmlns:a="http://schemas.openxmlformats.org/drawingml/2006/main">
@@ -918,12 +918,12 @@
           </a:p>
           <a:p xmlns:a="http://schemas.openxmlformats.org/drawingml/2006/main">
             <a:r>
-              <a:t>Rozšíření: Student porovná výsledky dvou vyhledávačů nebo český a anglický odborný termín.</a:t>
-            </a:r>
-          </a:p>
-          <a:p xmlns:a="http://schemas.openxmlformats.org/drawingml/2006/main">
-            <a:r>
-              <a:t>Pro rychlou mezikontrolu nech dvojice vyměnit výstup a označit jeden dobře doložený bod a jednu otázku, která ještě zůstává.</a:t>
+              <a:t>Rozšíření: Student porovná výsledky dvou vyhledávačů nebo český a anglický odborný termín.</a:t>
+            </a:r>
+          </a:p>
+          <a:p xmlns:a="http://schemas.openxmlformats.org/drawingml/2006/main">
+            <a:r>
+              <a:t>Pro rychlou mezikontrolu nech dvojice vyměnit výstup a označit jeden dobře doložený bod a jednu otázku, která ještě zůstává.</a:t>
             </a:r>
           </a:p>
         </p:txBody>
@@ -993,17 +993,17 @@
           <a:lstStyle xmlns:a="http://schemas.openxmlformats.org/drawingml/2006/main"/>
           <a:p xmlns:a="http://schemas.openxmlformats.org/drawingml/2006/main">
             <a:r>
-              <a:t>Očekávané závěry: NÚKIB PDF: Např. kybernetická bezpečnost site:nukib.gov.cz filetype:pdf. | Adresa školy: Např. přesný název vaší školy a operátor site: s doménou školního webu. | ÚOOÚ školství: Např. školství osobní údaje site:uoou.gov.cz. | 2FA: Odborný dotaz s termínem dvoufaktorová autentizace a identifikovanou institucí či autorem. | Dva zdroje: Nestačí dva výsledky přebírající stejnou tiskovou zprávu; hledej nezávislý původ.</a:t>
-            </a:r>
-          </a:p>
-          <a:p xmlns:a="http://schemas.openxmlformats.org/drawingml/2006/main">
-            <a:r>
-              <a:t>Časté chyby a intervence: Student zapisuje pouze odpověď. → Vrať úkol k dohledatelné cestě: dotaz – URL – původce – důvod výběru. | „Oficiální zdroj je vždy nejlepší.“ → Je vhodný pro vlastní pravidla instituce; pro dopad či kritiku může být potřeba jiný typ zdroje. | Student mění dotaz bez záznamu. → Nech zachovat alespoň první a poslední verzi, aby byl postup viditelný.</a:t>
-            </a:r>
-          </a:p>
-          <a:p xmlns:a="http://schemas.openxmlformats.org/drawingml/2006/main">
-            <a:r>
-              <a:t>Nečti celý klíč. Vyber dva studentské postupy, které vedou k odlišným závěrům, a nech třídu určit, který je lépe podložený.</a:t>
+              <a:t>Očekávané závěry: NÚKIB PDF: Např. kybernetická bezpečnost site:nukib.gov.cz filetype:pdf. | Adresa školy: Např. přesný název vaší školy a operátor site: s doménou školního webu. | ÚOOÚ školství: Např. školství osobní údaje site:uoou.gov.cz. | 2FA: Odborný dotaz s termínem dvoufaktorová autentizace a identifikovanou institucí či autorem. | Dva zdroje: Nestačí dva výsledky přebírající stejnou tiskovou zprávu; hledej nezávislý původ.</a:t>
+            </a:r>
+          </a:p>
+          <a:p xmlns:a="http://schemas.openxmlformats.org/drawingml/2006/main">
+            <a:r>
+              <a:t>Časté chyby a intervence: Student zapisuje pouze odpověď. → Vrať úkol k dohledatelné cestě: dotaz – URL – původce – důvod výběru. | „Oficiální zdroj je vždy nejlepší.“ → Je vhodný pro vlastní pravidla instituce; pro dopad či kritiku může být potřeba jiný typ zdroje. | Student mění dotaz bez záznamu. → Nech zachovat alespoň první a poslední verzi, aby byl postup viditelný.</a:t>
+            </a:r>
+          </a:p>
+          <a:p xmlns:a="http://schemas.openxmlformats.org/drawingml/2006/main">
+            <a:r>
+              <a:t>Nečti celý klíč. Vyber dva studentské postupy, které vedou k odlišným závěrům, a nech třídu určit, který je lépe podložený.</a:t>
             </a:r>
           </a:p>
         </p:txBody>
@@ -1073,7 +1073,7 @@
           <a:lstStyle xmlns:a="http://schemas.openxmlformats.org/drawingml/2006/main"/>
           <a:p xmlns:a="http://schemas.openxmlformats.org/drawingml/2006/main">
             <a:r>
-              <a:t>Exit ticket: Napiš původní a vylepšený dotaz a jednou větou popiš rozdíl ve výsledcích.</a:t>
+              <a:t>Exit ticket: Napiš původní a vylepšený dotaz a jednou větou popiš rozdíl ve výsledcích.</a:t>
             </a:r>
           </a:p>
           <a:p xmlns:a="http://schemas.openxmlformats.org/drawingml/2006/main">
@@ -1083,17 +1083,17 @@
           </a:p>
           <a:p xmlns:a="http://schemas.openxmlformats.org/drawingml/2006/main">
             <a:r>
-              <a:t>Rozšíření: Student porovná výsledky dvou vyhledávačů nebo český a anglický odborný termín.</a:t>
-            </a:r>
-          </a:p>
-          <a:p xmlns:a="http://schemas.openxmlformats.org/drawingml/2006/main">
-            <a:r>
-              <a:t>Když technika selže: Bez internetu studenti vytvoří a obhájí dotazy pro všech šest úkolů; výsledky doplní v další hodině.</a:t>
-            </a:r>
-          </a:p>
-          <a:p xmlns:a="http://schemas.openxmlformats.org/drawingml/2006/main">
-            <a:r>
-              <a:t>Vyber způsob odevzdání předem. Odpověď použij jako diagnostiku pro začátek další hodiny; nehodnoť pouze formální správnost, ale konkrétnost a zdůvodnění.</a:t>
+              <a:t>Rozšíření: Student porovná výsledky dvou vyhledávačů nebo český a anglický odborný termín.</a:t>
+            </a:r>
+          </a:p>
+          <a:p xmlns:a="http://schemas.openxmlformats.org/drawingml/2006/main">
+            <a:r>
+              <a:t>Když technika selže: Bez internetu studenti vytvoří a obhájí dotazy pro všech šest úkolů; výsledky doplní v další hodině.</a:t>
+            </a:r>
+          </a:p>
+          <a:p xmlns:a="http://schemas.openxmlformats.org/drawingml/2006/main">
+            <a:r>
+              <a:t>Vyber způsob odevzdání předem. Odpověď použij jako diagnostiku pro začátek další hodiny; nehodnoť pouze formální správnost, ale konkrétnost a zdůvodnění.</a:t>
             </a:r>
           </a:p>
         </p:txBody>
@@ -1828,7 +1828,7 @@
             </a:pPr>
             <a:r>
               <a:t>INTERNET, BEZPEČNOST
-A PRÁCE S INFORMACEMI</a:t>
+A PRÁCE S INFORMACEMI</a:t>
             </a:r>
           </a:p>
         </p:txBody>
@@ -1918,7 +1918,7 @@
               </a:defRPr>
             </a:pPr>
             <a:r>
-              <a:t>Student převede informační potřebu na přesný dotaz, použije operátory a zaznamená cestu k vybranému zdroji.</a:t>
+              <a:t>Student převede informační potřebu na přesný dotaz, použije operátory a zaznamená cestu k vybranému zdroji.</a:t>
             </a:r>
           </a:p>
         </p:txBody>
@@ -3153,7 +3153,7 @@
               </a:defRPr>
             </a:pPr>
             <a:r>
-              <a:t>Jiný zdroj potřebuješ pro pravidlo instituce, odborné vysvětlení a zkušenost uživatele.</a:t>
+              <a:t>Jiný zdroj potřebuješ pro pravidlo instituce, odborné vysvětlení a zkušenost uživatele.</a:t>
             </a:r>
           </a:p>
         </p:txBody>
@@ -3288,7 +3288,7 @@
               </a:defRPr>
             </a:pPr>
             <a:r>
-              <a:t>Zapiš dotaz, URL, původce a důvod výběru. Samotná odpověď nestačí.</a:t>
+              <a:t>Zapiš dotaz, URL, původce a důvod výběru. Samotná odpověď nestačí.</a:t>
             </a:r>
           </a:p>
         </p:txBody>
@@ -3368,7 +3368,7 @@
               </a:defRPr>
             </a:pPr>
             <a:r>
-              <a:t>Nejde o rychlý tip. Jde o postup, který lze vysvětlit a zopakovat.</a:t>
+              <a:t>Nejde o rychlý tip. Jde o postup, který lze vysvětlit a zopakovat.</a:t>
             </a:r>
           </a:p>
         </p:txBody>
@@ -3872,7 +3872,7 @@
               </a:defRPr>
             </a:pPr>
             <a:r>
-              <a:t>Zachovej první i vylepšenou verzi dotazu, aby byl vidět posun.</a:t>
+              <a:t>Zachovej první i vylepšenou verzi dotazu, aby byl vidět posun.</a:t>
             </a:r>
           </a:p>
         </p:txBody>
@@ -4212,7 +4212,7 @@
               </a:defRPr>
             </a:pPr>
             <a:r>
-              <a:t>Ulož URL, původce a jednu větu, proč je zdroj pro tento úkol vhodný.</a:t>
+              <a:t>Ulož URL, původce a jednu větu, proč je zdroj pro tento úkol vhodný.</a:t>
             </a:r>
           </a:p>
         </p:txBody>
@@ -4302,7 +4302,7 @@
               </a:defRPr>
             </a:pPr>
             <a:r>
-              <a:t>Záznam šesti dotazů, vybraných URL, původců a důvodů výběru.</a:t>
+              <a:t>Záznam šesti dotazů, vybraných URL, původců a důvodů výběru.</a:t>
             </a:r>
           </a:p>
         </p:txBody>
@@ -4716,7 +4716,7 @@
               </a:defRPr>
             </a:pPr>
             <a:r>
-              <a:t>Student doloží alespoň čtyři úkoly dotazem, zdrojem a vysvětlením vhodnosti.</a:t>
+              <a:t>Student doloží alespoň čtyři úkoly dotazem, zdrojem a vysvětlením vhodnosti.</a:t>
             </a:r>
           </a:p>
         </p:txBody>
@@ -4886,7 +4886,7 @@
               </a:defRPr>
             </a:pPr>
             <a:r>
-              <a:t>Které slovo v dotazu je příliš obecné a čím ho nahradíš?</a:t>
+              <a:t>Které slovo v dotazu je příliš obecné a čím ho nahradíš?</a:t>
             </a:r>
           </a:p>
         </p:txBody>
@@ -5226,7 +5226,7 @@
               </a:defRPr>
             </a:pPr>
             <a:r>
-              <a:t>Jak poznáš reklamní výsledek a proč nemusí být první výsledek nejlepší?</a:t>
+              <a:t>Jak poznáš reklamní výsledek a proč nemusí být první výsledek nejlepší?</a:t>
             </a:r>
           </a:p>
         </p:txBody>
@@ -5695,7 +5695,7 @@
               </a:defRPr>
             </a:pPr>
             <a:r>
-              <a:t>Např. přesný název vaší školy a operátor site: s doménou školního webu.</a:t>
+              <a:t>Např. přesný název vaší školy a operátor site: s doménou školního webu.</a:t>
             </a:r>
           </a:p>
         </p:txBody>
@@ -5955,7 +5955,7 @@
               </a:defRPr>
             </a:pPr>
             <a:r>
-              <a:t>Vraťte úkol k dohledatelné cestě: dotaz – URL – původce – důvod výběru.</a:t>
+              <a:t>Vraťte úkol k dohledatelné cestě: dotaz – URL – původce – důvod výběru.</a:t>
             </a:r>
           </a:p>
         </p:txBody>
@@ -6000,7 +6000,7 @@
               </a:defRPr>
             </a:pPr>
             <a:r>
-              <a:t>Vrať se k úvodnímu rozhodnutí. Co bys teď změnil — a proč?</a:t>
+              <a:t>Vrať se k úvodnímu rozhodnutí. Co bys teď změnil — a proč?</a:t>
             </a:r>
           </a:p>
         </p:txBody>
@@ -6199,7 +6199,7 @@
               </a:defRPr>
             </a:pPr>
             <a:r>
-              <a:t>Napiš původní a vylepšený dotaz a jednou větou popiš rozdíl ve výsledcích.</a:t>
+              <a:t>Napiš původní a vylepšený dotaz a jednou větou popiš rozdíl ve výsledcích.</a:t>
             </a:r>
           </a:p>
         </p:txBody>
